--- a/2024/2024-04-05-AI-Updates.pptx
+++ b/2024/2024-04-05-AI-Updates.pptx
@@ -1474,7 +1474,7 @@
         </p:nvSpPr>
         <p:spPr>
           <a:xfrm>
-            <a:off x="381000" y="685800"/>
+            <a:off x="381300" y="685800"/>
             <a:ext cx="6096000" cy="3429000"/>
           </a:xfrm>
           <a:custGeom>
@@ -13405,8 +13405,8 @@
         </p:nvSpPr>
         <p:spPr>
           <a:xfrm>
-            <a:off x="5029200" y="2441749"/>
-            <a:ext cx="3978025" cy="1456200"/>
+            <a:off x="5190925" y="2441749"/>
+            <a:ext cx="3816300" cy="1456200"/>
           </a:xfrm>
           <a:prstGeom prst="rect">
             <a:avLst/>
@@ -13445,7 +13445,7 @@
               <a:buNone/>
             </a:pPr>
             <a:r>
-              <a:rPr lang="en" sz="1300" b="1" dirty="0">
+              <a:rPr lang="en" sz="1300" b="1">
                 <a:solidFill>
                   <a:srgbClr val="FF0000"/>
                 </a:solidFill>
@@ -13456,7 +13456,7 @@
               </a:rPr>
               <a:t>What is Coherent Memory?</a:t>
             </a:r>
-            <a:endParaRPr sz="1300" b="1" dirty="0">
+            <a:endParaRPr sz="1300" b="1">
               <a:solidFill>
                 <a:srgbClr val="FF0000"/>
               </a:solidFill>
@@ -13481,7 +13481,7 @@
               <a:buFont typeface="Arial"/>
               <a:buNone/>
             </a:pPr>
-            <a:endParaRPr sz="1300" dirty="0">
+            <a:endParaRPr sz="1300">
               <a:latin typeface="Calibri"/>
               <a:ea typeface="Calibri"/>
               <a:cs typeface="Calibri"/>
@@ -13504,7 +13504,7 @@
               <a:buChar char="●"/>
             </a:pPr>
             <a:r>
-              <a:rPr lang="en" sz="1300" b="1" dirty="0">
+              <a:rPr lang="en" sz="1300" b="1">
                 <a:solidFill>
                   <a:srgbClr val="FF0000"/>
                 </a:solidFill>
@@ -13515,7 +13515,7 @@
               </a:rPr>
               <a:t>GH200 has 576 GB of "Coherent memory"</a:t>
             </a:r>
-            <a:endParaRPr sz="1300" b="1" dirty="0">
+            <a:endParaRPr sz="1300" b="1">
               <a:solidFill>
                 <a:srgbClr val="FF0000"/>
               </a:solidFill>
@@ -13538,7 +13538,7 @@
               <a:buChar char="●"/>
             </a:pPr>
             <a:r>
-              <a:rPr lang="en" sz="1300" dirty="0">
+              <a:rPr lang="en" sz="1300">
                 <a:latin typeface="Calibri"/>
                 <a:ea typeface="Calibri"/>
                 <a:cs typeface="Calibri"/>
@@ -13546,7 +13546,7 @@
               </a:rPr>
               <a:t>Coherent memory creates a single, unified memory space accessible by both the CPU and GPU. </a:t>
             </a:r>
-            <a:endParaRPr sz="1300" dirty="0">
+            <a:endParaRPr sz="1300">
               <a:latin typeface="Calibri"/>
               <a:ea typeface="Calibri"/>
               <a:cs typeface="Calibri"/>
@@ -13566,7 +13566,7 @@
               <a:buChar char="●"/>
             </a:pPr>
             <a:r>
-              <a:rPr lang="en" sz="1300" dirty="0">
+              <a:rPr lang="en" sz="1300">
                 <a:latin typeface="Calibri"/>
                 <a:ea typeface="Calibri"/>
                 <a:cs typeface="Calibri"/>
@@ -13574,7 +13574,7 @@
               </a:rPr>
               <a:t>Both CPU and GPU can see and operate on the same data without the need for explicit memory transfers.</a:t>
             </a:r>
-            <a:endParaRPr sz="1300" dirty="0">
+            <a:endParaRPr sz="1300">
               <a:latin typeface="Calibri"/>
               <a:ea typeface="Calibri"/>
               <a:cs typeface="Calibri"/>
@@ -13657,8 +13657,8 @@
         </p:nvSpPr>
         <p:spPr>
           <a:xfrm>
-            <a:off x="5029200" y="3975049"/>
-            <a:ext cx="3978025" cy="1056000"/>
+            <a:off x="5190925" y="3975049"/>
+            <a:ext cx="3816300" cy="1056000"/>
           </a:xfrm>
           <a:prstGeom prst="rect">
             <a:avLst/>
@@ -13692,7 +13692,7 @@
               <a:buNone/>
             </a:pPr>
             <a:r>
-              <a:rPr lang="en" sz="1300" b="1" dirty="0">
+              <a:rPr lang="en" sz="1300" b="1">
                 <a:solidFill>
                   <a:srgbClr val="FF0000"/>
                 </a:solidFill>
@@ -13703,7 +13703,7 @@
               </a:rPr>
               <a:t>Apple Silicone Unified Memory</a:t>
             </a:r>
-            <a:endParaRPr sz="1300" dirty="0">
+            <a:endParaRPr sz="1300">
               <a:latin typeface="Calibri"/>
               <a:ea typeface="Calibri"/>
               <a:cs typeface="Calibri"/>
@@ -13721,7 +13721,7 @@
               <a:buNone/>
             </a:pPr>
             <a:r>
-              <a:rPr lang="en" sz="1300" dirty="0">
+              <a:rPr lang="en" sz="1300">
                 <a:latin typeface="Calibri"/>
                 <a:ea typeface="Calibri"/>
                 <a:cs typeface="Calibri"/>
@@ -13730,7 +13730,7 @@
               <a:t>Nvidia "Coherent Memory" is very similar to Apple Silicone Mac's </a:t>
             </a:r>
             <a:r>
-              <a:rPr lang="en" sz="1300" b="1" dirty="0">
+              <a:rPr lang="en" sz="1300" b="1">
                 <a:solidFill>
                   <a:srgbClr val="FF0000"/>
                 </a:solidFill>
@@ -13742,7 +13742,7 @@
               <a:t>Unified Memory</a:t>
             </a:r>
             <a:r>
-              <a:rPr lang="en" sz="1300" dirty="0">
+              <a:rPr lang="en" sz="1300">
                 <a:latin typeface="Calibri"/>
                 <a:ea typeface="Calibri"/>
                 <a:cs typeface="Calibri"/>
@@ -13750,7 +13750,7 @@
               </a:rPr>
               <a:t>.</a:t>
             </a:r>
-            <a:endParaRPr sz="1300" dirty="0">
+            <a:endParaRPr sz="1300">
               <a:latin typeface="Calibri"/>
               <a:ea typeface="Calibri"/>
               <a:cs typeface="Calibri"/>
@@ -13768,7 +13768,7 @@
               <a:buNone/>
             </a:pPr>
             <a:r>
-              <a:rPr lang="en" sz="1300" dirty="0">
+              <a:rPr lang="en" sz="1300">
                 <a:latin typeface="Calibri"/>
                 <a:ea typeface="Calibri"/>
                 <a:cs typeface="Calibri"/>
@@ -13777,7 +13777,7 @@
               <a:t>(128 GB laptops, or 192 GB Studio or Pro)</a:t>
             </a:r>
             <a:br>
-              <a:rPr lang="en" sz="1300" dirty="0">
+              <a:rPr lang="en" sz="1300">
                 <a:latin typeface="Calibri"/>
                 <a:ea typeface="Calibri"/>
                 <a:cs typeface="Calibri"/>
@@ -13785,7 +13785,7 @@
               </a:rPr>
             </a:br>
             <a:r>
-              <a:rPr lang="en" sz="1300" dirty="0">
+              <a:rPr lang="en" sz="1300">
                 <a:latin typeface="Calibri"/>
                 <a:ea typeface="Calibri"/>
                 <a:cs typeface="Calibri"/>
@@ -13793,7 +13793,7 @@
               </a:rPr>
               <a:t>(using Apple’s MLX framework)</a:t>
             </a:r>
-            <a:endParaRPr sz="1300" dirty="0">
+            <a:endParaRPr sz="1300">
               <a:latin typeface="Calibri"/>
               <a:ea typeface="Calibri"/>
               <a:cs typeface="Calibri"/>
@@ -17072,13 +17072,25 @@
               <a:buNone/>
             </a:pPr>
             <a:r>
+              <a:rPr lang="en" sz="1300" b="1">
+                <a:solidFill>
+                  <a:srgbClr val="FF0000"/>
+                </a:solidFill>
+                <a:latin typeface="Calibri"/>
+                <a:ea typeface="Calibri"/>
+                <a:cs typeface="Calibri"/>
+                <a:sym typeface="Calibri"/>
+              </a:rPr>
+              <a:t>Apple</a:t>
+            </a:r>
+            <a:r>
               <a:rPr lang="en" sz="1300">
                 <a:latin typeface="Calibri"/>
                 <a:ea typeface="Calibri"/>
                 <a:cs typeface="Calibri"/>
                 <a:sym typeface="Calibri"/>
               </a:rPr>
-              <a:t>Apple has developed a new system called </a:t>
+              <a:t> has developed a new system called </a:t>
             </a:r>
             <a:r>
               <a:rPr lang="en" sz="1300" b="1">
